--- a/assets/pptx/catalog-608.pptx
+++ b/assets/pptx/catalog-608.pptx
@@ -3404,7 +3404,7 @@
                 <a:ea typeface="Ebrima"/>
                 <a:cs typeface="Ebrima"/>
               </a:rPr>
-              <a:t>እየዋለ እያደር ታምራትህ በዛ የነገስታት ንጉስ የጌቶቹ ጌታ (2x)</a:t>
+              <a:t>እየዋለ እያደር ታምራትህ በዛ የነገስታት ንጉስ የጌቶቹ ጌታ 2x</a:t>
             </a:r>
           </a:p>
         </p:txBody>
@@ -3940,7 +3940,7 @@
                 <a:ea typeface="Ebrima"/>
                 <a:cs typeface="Ebrima"/>
               </a:rPr>
-              <a:t>- ሁሉን አድርገህልኛል የቀረብኝም የለም ሌላ ምልህ ባይኖረኝ እወድሃለሁ እኔም ሌላ ምልህ ባይኖረኝ እወድሃለሁ እኔም (2x)</a:t>
+              <a:t>- ሁሉን አድርገህልኛል የቀረብኝም የለም ሌላ ምልህ ባይኖረኝ እወድሃለሁ እኔም ሌላ ምልህ ባይኖረኝ እወድሃለሁ እኔም 2x</a:t>
             </a:r>
           </a:p>
         </p:txBody>
@@ -4007,7 +4007,7 @@
                 <a:ea typeface="Ebrima"/>
                 <a:cs typeface="Ebrima"/>
               </a:rPr>
-              <a:t>ዛሬም ደገምከኝ አብዝተህ (2x)</a:t>
+              <a:t>ዛሬም ደገምከኝ አብዝተህ 2x</a:t>
             </a:r>
           </a:p>
         </p:txBody>
@@ -4141,7 +4141,7 @@
                 <a:ea typeface="Ebrima"/>
                 <a:cs typeface="Ebrima"/>
               </a:rPr>
-              <a:t>እየዋለ እያደር ታምራትህ በዛ የነገስታት ንጉስ የጌቶቹ ጌታ (2x)</a:t>
+              <a:t>እየዋለ እያደር ታምራትህ በዛ የነገስታት ንጉስ የጌቶቹ ጌታ 2x</a:t>
             </a:r>
           </a:p>
         </p:txBody>
@@ -4543,7 +4543,7 @@
                 <a:ea typeface="Ebrima"/>
                 <a:cs typeface="Ebrima"/>
               </a:rPr>
-              <a:t>የነሃሱን ደጆች ሰባብረህ እኔን ለክብር አበቃህ (2x)</a:t>
+              <a:t>የነሃሱን ደጆች ሰባብረህ እኔን ለክብር አበቃህ 2x</a:t>
             </a:r>
           </a:p>
         </p:txBody>
@@ -4811,7 +4811,7 @@
                 <a:ea typeface="Ebrima"/>
                 <a:cs typeface="Ebrima"/>
               </a:rPr>
-              <a:t>ንጉሴ መደገፊያዬ ነው አምባዬ (2x)</a:t>
+              <a:t>ንጉሴ መደገፊያዬ ነው አምባዬ 2x</a:t>
             </a:r>
           </a:p>
         </p:txBody>
@@ -5012,7 +5012,7 @@
                 <a:ea typeface="Ebrima"/>
                 <a:cs typeface="Ebrima"/>
               </a:rPr>
-              <a:t>አጎናጽፈኅኛል የሰራዊት ጌታ (2x)</a:t>
+              <a:t>አጎናጽፈኅኛል የሰራዊት ጌታ 2x</a:t>
             </a:r>
           </a:p>
         </p:txBody>
@@ -5079,7 +5079,7 @@
                 <a:ea typeface="Ebrima"/>
                 <a:cs typeface="Ebrima"/>
               </a:rPr>
-              <a:t>- ሁሉን አድርገህልኛል የቀረብኝም የለም ሌላ ምልህ ባይኖረኝ እወድሃለሁ እኔም ሌላ ምልህ ባይኖረኝ እወድሃለሁ እኔም (2x)</a:t>
+              <a:t>- ሁሉን አድርገህልኛል የቀረብኝም የለም ሌላ ምልህ ባይኖረኝ እወድሃለሁ እኔም ሌላ ምልህ ባይኖረኝ እወድሃለሁ እኔም 2x</a:t>
             </a:r>
           </a:p>
         </p:txBody>
